--- a/Documentation/Reports and Papers/Dissertation/Figures/60-sns/components/sns_curriculum.pptx
+++ b/Documentation/Reports and Papers/Dissertation/Figures/60-sns/components/sns_curriculum.pptx
@@ -7,7 +7,7 @@
   <p:sldIdLst>
     <p:sldId id="256" r:id="rId7"/>
   </p:sldIdLst>
-  <p:sldSz cx="5940000" cy="3744000" type="screen4x3"/>
+  <p:sldSz cx="5943600" cy="3644900" type="screen4x3"/>
   <p:notesSz cx="6858000" cy="9144000"/>
   <p:defaultTextStyle>
     <a:defPPr>
@@ -3096,8 +3096,8 @@
         </p:nvSpPr>
         <p:spPr>
           <a:xfrm>
-            <a:off x="522000" y="108000"/>
-            <a:ext cx="1224000" cy="270000"/>
+            <a:off x="177800" y="101600"/>
+            <a:ext cx="342900" cy="228600"/>
           </a:xfrm>
           <a:prstGeom prst="rect">
             <a:avLst/>
@@ -3105,20 +3105,30 @@
           <a:noFill/>
         </p:spPr>
         <p:txBody>
-          <a:bodyPr wrap="square" lIns="10800" rIns="10800" tIns="3600" bIns="3600">
-            <a:spAutoFit/>
+          <a:bodyPr wrap="none" lIns="0" rIns="0" tIns="0" bIns="0">
+            <a:noAutofit/>
           </a:bodyPr>
           <a:lstStyle/>
           <a:p>
-            <a:pPr algn="l"/>
-            <a:r>
-              <a:rPr sz="1000" b="1">
-                <a:solidFill>
-                  <a:srgbClr val="1F1F1F"/>
+            <a:pPr algn="l">
+              <a:lnSpc>
+                <a:spcPts val="1210"/>
+              </a:lnSpc>
+              <a:spcBef>
+                <a:spcPts val="0"/>
+              </a:spcBef>
+              <a:spcAft>
+                <a:spcPts val="0"/>
+              </a:spcAft>
+            </a:pPr>
+            <a:r>
+              <a:rPr sz="1100" b="1" i="0">
+                <a:solidFill>
+                  <a:srgbClr val="243343"/>
                 </a:solidFill>
                 <a:latin typeface="Arial"/>
               </a:rPr>
-              <a:t>Stage</a:t>
+              <a:t>No.</a:t>
             </a:r>
           </a:p>
         </p:txBody>
@@ -3131,8 +3141,8 @@
         </p:nvSpPr>
         <p:spPr>
           <a:xfrm>
-            <a:off x="1925999" y="108000"/>
-            <a:ext cx="1655999" cy="270000"/>
+            <a:off x="609600" y="101600"/>
+            <a:ext cx="1397000" cy="228600"/>
           </a:xfrm>
           <a:prstGeom prst="rect">
             <a:avLst/>
@@ -3140,20 +3150,30 @@
           <a:noFill/>
         </p:spPr>
         <p:txBody>
-          <a:bodyPr wrap="square" lIns="10800" rIns="10800" tIns="3600" bIns="3600">
-            <a:spAutoFit/>
+          <a:bodyPr wrap="none" lIns="0" rIns="0" tIns="0" bIns="0">
+            <a:noAutofit/>
           </a:bodyPr>
           <a:lstStyle/>
           <a:p>
-            <a:pPr algn="l"/>
-            <a:r>
-              <a:rPr sz="1000" b="1">
-                <a:solidFill>
-                  <a:srgbClr val="1F1F1F"/>
+            <a:pPr algn="l">
+              <a:lnSpc>
+                <a:spcPts val="1210"/>
+              </a:lnSpc>
+              <a:spcBef>
+                <a:spcPts val="0"/>
+              </a:spcBef>
+              <a:spcAft>
+                <a:spcPts val="0"/>
+              </a:spcAft>
+            </a:pPr>
+            <a:r>
+              <a:rPr sz="1100" b="1" i="0">
+                <a:solidFill>
+                  <a:srgbClr val="243343"/>
                 </a:solidFill>
                 <a:latin typeface="Arial"/>
               </a:rPr>
-              <a:t>Capability added</a:t>
+              <a:t>Preparation</a:t>
             </a:r>
           </a:p>
         </p:txBody>
@@ -3166,8 +3186,8 @@
         </p:nvSpPr>
         <p:spPr>
           <a:xfrm>
-            <a:off x="3798000" y="108000"/>
-            <a:ext cx="1944000" cy="270000"/>
+            <a:off x="2235200" y="101600"/>
+            <a:ext cx="1625600" cy="228600"/>
           </a:xfrm>
           <a:prstGeom prst="rect">
             <a:avLst/>
@@ -3175,133 +3195,44 @@
           <a:noFill/>
         </p:spPr>
         <p:txBody>
-          <a:bodyPr wrap="square" lIns="10800" rIns="10800" tIns="3600" bIns="3600">
-            <a:spAutoFit/>
+          <a:bodyPr wrap="none" lIns="0" rIns="0" tIns="0" bIns="0">
+            <a:noAutofit/>
           </a:bodyPr>
           <a:lstStyle/>
           <a:p>
-            <a:pPr algn="l"/>
-            <a:r>
-              <a:rPr sz="1000" b="1">
-                <a:solidFill>
-                  <a:srgbClr val="1F1F1F"/>
+            <a:pPr algn="l">
+              <a:lnSpc>
+                <a:spcPts val="1210"/>
+              </a:lnSpc>
+              <a:spcBef>
+                <a:spcPts val="0"/>
+              </a:spcBef>
+              <a:spcAft>
+                <a:spcPts val="0"/>
+              </a:spcAft>
+            </a:pPr>
+            <a:r>
+              <a:rPr sz="1100" b="1" i="0">
+                <a:solidFill>
+                  <a:srgbClr val="243343"/>
                 </a:solidFill>
                 <a:latin typeface="Arial"/>
               </a:rPr>
-              <a:t>Stage score</a:t>
-            </a:r>
-          </a:p>
-        </p:txBody>
-      </p:sp>
-      <p:sp>
-        <p:nvSpPr>
-          <p:cNvPr id="5" name="Rounded Rectangle 4"/>
-          <p:cNvSpPr/>
-          <p:nvPr/>
-        </p:nvSpPr>
-        <p:spPr>
-          <a:xfrm>
-            <a:off x="108000" y="378000"/>
-            <a:ext cx="5724000" cy="486000"/>
-          </a:xfrm>
-          <a:prstGeom prst="roundRect">
-            <a:avLst/>
-          </a:prstGeom>
-          <a:solidFill>
-            <a:srgbClr val="F2F2F2"/>
-          </a:solidFill>
-          <a:ln w="12700">
-            <a:solidFill>
-              <a:srgbClr val="1F1F1F"/>
-            </a:solidFill>
-          </a:ln>
-        </p:spPr>
-        <p:style>
-          <a:lnRef idx="1">
-            <a:schemeClr val="accent1"/>
-          </a:lnRef>
-          <a:fillRef idx="3">
-            <a:schemeClr val="accent1"/>
-          </a:fillRef>
-          <a:effectRef idx="2">
-            <a:schemeClr val="accent1"/>
-          </a:effectRef>
-          <a:fontRef idx="minor">
-            <a:schemeClr val="lt1"/>
-          </a:fontRef>
-        </p:style>
-        <p:txBody>
-          <a:bodyPr rtlCol="0" anchor="ctr"/>
-          <a:lstStyle/>
-          <a:p>
-            <a:pPr algn="ctr"/>
-          </a:p>
-        </p:txBody>
-      </p:sp>
-      <p:sp>
-        <p:nvSpPr>
-          <p:cNvPr id="6" name="Rounded Rectangle 5"/>
-          <p:cNvSpPr/>
-          <p:nvPr/>
-        </p:nvSpPr>
-        <p:spPr>
-          <a:xfrm>
-            <a:off x="162000" y="503999"/>
-            <a:ext cx="234000" cy="234000"/>
-          </a:xfrm>
-          <a:prstGeom prst="roundRect">
-            <a:avLst/>
-          </a:prstGeom>
-          <a:solidFill>
-            <a:srgbClr val="D9E8F4"/>
-          </a:solidFill>
-          <a:ln w="9525">
-            <a:solidFill>
-              <a:srgbClr val="1F1F1F"/>
-            </a:solidFill>
-          </a:ln>
-        </p:spPr>
-        <p:style>
-          <a:lnRef idx="1">
-            <a:schemeClr val="accent1"/>
-          </a:lnRef>
-          <a:fillRef idx="3">
-            <a:schemeClr val="accent1"/>
-          </a:fillRef>
-          <a:effectRef idx="2">
-            <a:schemeClr val="accent1"/>
-          </a:effectRef>
-          <a:fontRef idx="minor">
-            <a:schemeClr val="lt1"/>
-          </a:fontRef>
-        </p:style>
-        <p:txBody>
-          <a:bodyPr rtlCol="0" anchor="ctr" wrap="none"/>
-          <a:lstStyle/>
-          <a:p>
-            <a:pPr algn="ctr"/>
-            <a:r>
-              <a:rPr sz="1100" b="1">
-                <a:solidFill>
-                  <a:srgbClr val="1F1F1F"/>
-                </a:solidFill>
-                <a:latin typeface="Arial"/>
-              </a:rPr>
-              <a:t>1</a:t>
-            </a:r>
-          </a:p>
-        </p:txBody>
-      </p:sp>
-      <p:sp>
-        <p:nvSpPr>
-          <p:cNvPr id="7" name="TextBox 6"/>
+              <a:t>Capability</a:t>
+            </a:r>
+          </a:p>
+        </p:txBody>
+      </p:sp>
+      <p:sp>
+        <p:nvSpPr>
+          <p:cNvPr id="5" name="TextBox 4"/>
           <p:cNvSpPr txBox="1"/>
           <p:nvPr/>
         </p:nvSpPr>
         <p:spPr>
           <a:xfrm>
-            <a:off x="522000" y="478800"/>
-            <a:ext cx="1296000" cy="270000"/>
+            <a:off x="4114800" y="101600"/>
+            <a:ext cx="1651000" cy="228600"/>
           </a:xfrm>
           <a:prstGeom prst="rect">
             <a:avLst/>
@@ -3309,1109 +3240,52 @@
           <a:noFill/>
         </p:spPr>
         <p:txBody>
-          <a:bodyPr wrap="square" lIns="10800" rIns="10800" tIns="3600" bIns="3600">
-            <a:spAutoFit/>
+          <a:bodyPr wrap="none" lIns="0" rIns="0" tIns="0" bIns="0">
+            <a:noAutofit/>
           </a:bodyPr>
           <a:lstStyle/>
           <a:p>
-            <a:pPr algn="l"/>
-            <a:r>
-              <a:rPr sz="1000" b="1">
-                <a:solidFill>
-                  <a:srgbClr val="1F1F1F"/>
+            <a:pPr algn="l">
+              <a:lnSpc>
+                <a:spcPts val="1210"/>
+              </a:lnSpc>
+              <a:spcBef>
+                <a:spcPts val="0"/>
+              </a:spcBef>
+              <a:spcAft>
+                <a:spcPts val="0"/>
+              </a:spcAft>
+            </a:pPr>
+            <a:r>
+              <a:rPr sz="1100" b="1" i="0">
+                <a:solidFill>
+                  <a:srgbClr val="243343"/>
                 </a:solidFill>
                 <a:latin typeface="Arial"/>
               </a:rPr>
-              <a:t>Deafferented</a:t>
-            </a:r>
-          </a:p>
-          <a:p>
-            <a:pPr algn="l"/>
-            <a:r>
-              <a:rPr sz="1000" b="1">
-                <a:solidFill>
-                  <a:srgbClr val="1F1F1F"/>
-                </a:solidFill>
-                <a:latin typeface="Arial"/>
-              </a:rPr>
-              <a:t>air stepping</a:t>
-            </a:r>
-          </a:p>
-        </p:txBody>
-      </p:sp>
-      <p:sp>
-        <p:nvSpPr>
-          <p:cNvPr id="8" name="TextBox 7"/>
-          <p:cNvSpPr txBox="1"/>
-          <p:nvPr/>
-        </p:nvSpPr>
-        <p:spPr>
-          <a:xfrm>
-            <a:off x="1925999" y="478800"/>
-            <a:ext cx="1800000" cy="270000"/>
-          </a:xfrm>
-          <a:prstGeom prst="rect">
-            <a:avLst/>
-          </a:prstGeom>
-          <a:noFill/>
-        </p:spPr>
-        <p:txBody>
-          <a:bodyPr wrap="square" lIns="10800" rIns="10800" tIns="3600" bIns="3600">
-            <a:spAutoFit/>
-          </a:bodyPr>
-          <a:lstStyle/>
-          <a:p>
-            <a:pPr algn="l"/>
-            <a:r>
-              <a:rPr sz="1000" b="0">
-                <a:solidFill>
-                  <a:srgbClr val="1F1F1F"/>
-                </a:solidFill>
-                <a:latin typeface="Arial"/>
-              </a:rPr>
-              <a:t>half-center-free oscillation,</a:t>
-            </a:r>
-          </a:p>
-          <a:p>
-            <a:pPr algn="l"/>
-            <a:r>
-              <a:rPr sz="1000" b="0">
-                <a:solidFill>
-                  <a:srgbClr val="1F1F1F"/>
-                </a:solidFill>
-                <a:latin typeface="Arial"/>
-              </a:rPr>
-              <a:t>legs suspended, feedback off</a:t>
-            </a:r>
-          </a:p>
-        </p:txBody>
-      </p:sp>
-      <p:sp>
-        <p:nvSpPr>
-          <p:cNvPr id="9" name="TextBox 8"/>
-          <p:cNvSpPr txBox="1"/>
-          <p:nvPr/>
-        </p:nvSpPr>
-        <p:spPr>
-          <a:xfrm>
-            <a:off x="3798000" y="478800"/>
-            <a:ext cx="1872000" cy="270000"/>
-          </a:xfrm>
-          <a:prstGeom prst="rect">
-            <a:avLst/>
-          </a:prstGeom>
-          <a:noFill/>
-        </p:spPr>
-        <p:txBody>
-          <a:bodyPr wrap="square" lIns="10800" rIns="10800" tIns="3600" bIns="3600">
-            <a:spAutoFit/>
-          </a:bodyPr>
-          <a:lstStyle/>
-          <a:p>
-            <a:pPr algn="l"/>
-            <a:r>
-              <a:rPr sz="1000" b="0">
-                <a:solidFill>
-                  <a:srgbClr val="1F1F1F"/>
-                </a:solidFill>
-                <a:latin typeface="Arial"/>
-              </a:rPr>
-              <a:t>rhythm and swing depth</a:t>
-            </a:r>
-          </a:p>
-          <a:p>
-            <a:pPr algn="l"/>
-            <a:r>
-              <a:rPr sz="1000" b="0">
-                <a:solidFill>
-                  <a:srgbClr val="1F1F1F"/>
-                </a:solidFill>
-                <a:latin typeface="Arial"/>
-              </a:rPr>
-              <a:t>(rhythm-gated)</a:t>
-            </a:r>
-          </a:p>
-        </p:txBody>
-      </p:sp>
-      <p:sp>
-        <p:nvSpPr>
-          <p:cNvPr id="10" name="Rounded Rectangle 9"/>
-          <p:cNvSpPr/>
-          <p:nvPr/>
-        </p:nvSpPr>
-        <p:spPr>
-          <a:xfrm>
-            <a:off x="108000" y="961200"/>
-            <a:ext cx="5724000" cy="486000"/>
-          </a:xfrm>
-          <a:prstGeom prst="roundRect">
-            <a:avLst/>
-          </a:prstGeom>
-          <a:solidFill>
-            <a:srgbClr val="F2F2F2"/>
-          </a:solidFill>
-          <a:ln w="12700">
-            <a:solidFill>
-              <a:srgbClr val="1F1F1F"/>
-            </a:solidFill>
-          </a:ln>
-        </p:spPr>
-        <p:style>
-          <a:lnRef idx="1">
-            <a:schemeClr val="accent1"/>
-          </a:lnRef>
-          <a:fillRef idx="3">
-            <a:schemeClr val="accent1"/>
-          </a:fillRef>
-          <a:effectRef idx="2">
-            <a:schemeClr val="accent1"/>
-          </a:effectRef>
-          <a:fontRef idx="minor">
-            <a:schemeClr val="lt1"/>
-          </a:fontRef>
-        </p:style>
-        <p:txBody>
-          <a:bodyPr rtlCol="0" anchor="ctr"/>
-          <a:lstStyle/>
-          <a:p>
-            <a:pPr algn="ctr"/>
-          </a:p>
-        </p:txBody>
-      </p:sp>
-      <p:sp>
-        <p:nvSpPr>
-          <p:cNvPr id="11" name="Rounded Rectangle 10"/>
-          <p:cNvSpPr/>
-          <p:nvPr/>
-        </p:nvSpPr>
-        <p:spPr>
-          <a:xfrm>
-            <a:off x="162000" y="1087200"/>
-            <a:ext cx="234000" cy="234000"/>
-          </a:xfrm>
-          <a:prstGeom prst="roundRect">
-            <a:avLst/>
-          </a:prstGeom>
-          <a:solidFill>
-            <a:srgbClr val="BFD7EA"/>
-          </a:solidFill>
-          <a:ln w="9525">
-            <a:solidFill>
-              <a:srgbClr val="1F1F1F"/>
-            </a:solidFill>
-          </a:ln>
-        </p:spPr>
-        <p:style>
-          <a:lnRef idx="1">
-            <a:schemeClr val="accent1"/>
-          </a:lnRef>
-          <a:fillRef idx="3">
-            <a:schemeClr val="accent1"/>
-          </a:fillRef>
-          <a:effectRef idx="2">
-            <a:schemeClr val="accent1"/>
-          </a:effectRef>
-          <a:fontRef idx="minor">
-            <a:schemeClr val="lt1"/>
-          </a:fontRef>
-        </p:style>
-        <p:txBody>
-          <a:bodyPr rtlCol="0" anchor="ctr" wrap="none"/>
-          <a:lstStyle/>
-          <a:p>
-            <a:pPr algn="ctr"/>
-            <a:r>
-              <a:rPr sz="1100" b="1">
-                <a:solidFill>
-                  <a:srgbClr val="1F1F1F"/>
-                </a:solidFill>
-                <a:latin typeface="Arial"/>
-              </a:rPr>
-              <a:t>2</a:t>
-            </a:r>
-          </a:p>
-        </p:txBody>
-      </p:sp>
-      <p:sp>
-        <p:nvSpPr>
-          <p:cNvPr id="12" name="TextBox 11"/>
-          <p:cNvSpPr txBox="1"/>
-          <p:nvPr/>
-        </p:nvSpPr>
-        <p:spPr>
-          <a:xfrm>
-            <a:off x="522000" y="1062000"/>
-            <a:ext cx="1296000" cy="270000"/>
-          </a:xfrm>
-          <a:prstGeom prst="rect">
-            <a:avLst/>
-          </a:prstGeom>
-          <a:noFill/>
-        </p:spPr>
-        <p:txBody>
-          <a:bodyPr wrap="square" lIns="10800" rIns="10800" tIns="3600" bIns="3600">
-            <a:spAutoFit/>
-          </a:bodyPr>
-          <a:lstStyle/>
-          <a:p>
-            <a:pPr algn="l"/>
-            <a:r>
-              <a:rPr sz="1000" b="1">
-                <a:solidFill>
-                  <a:srgbClr val="1F1F1F"/>
-                </a:solidFill>
-                <a:latin typeface="Arial"/>
-              </a:rPr>
-              <a:t>Afferented</a:t>
-            </a:r>
-          </a:p>
-          <a:p>
-            <a:pPr algn="l"/>
-            <a:r>
-              <a:rPr sz="1000" b="1">
-                <a:solidFill>
-                  <a:srgbClr val="1F1F1F"/>
-                </a:solidFill>
-                <a:latin typeface="Arial"/>
-              </a:rPr>
-              <a:t>air stepping</a:t>
-            </a:r>
-          </a:p>
-        </p:txBody>
-      </p:sp>
-      <p:sp>
-        <p:nvSpPr>
-          <p:cNvPr id="13" name="TextBox 12"/>
-          <p:cNvSpPr txBox="1"/>
-          <p:nvPr/>
-        </p:nvSpPr>
-        <p:spPr>
-          <a:xfrm>
-            <a:off x="1925999" y="1062000"/>
-            <a:ext cx="1800000" cy="270000"/>
-          </a:xfrm>
-          <a:prstGeom prst="rect">
-            <a:avLst/>
-          </a:prstGeom>
-          <a:noFill/>
-        </p:spPr>
-        <p:txBody>
-          <a:bodyPr wrap="square" lIns="10800" rIns="10800" tIns="3600" bIns="3600">
-            <a:spAutoFit/>
-          </a:bodyPr>
-          <a:lstStyle/>
-          <a:p>
-            <a:pPr algn="l"/>
-            <a:r>
-              <a:rPr sz="1000" b="0">
-                <a:solidFill>
-                  <a:srgbClr val="1F1F1F"/>
-                </a:solidFill>
-                <a:latin typeface="Arial"/>
-              </a:rPr>
-              <a:t>heel, toe, and load</a:t>
-            </a:r>
-          </a:p>
-          <a:p>
-            <a:pPr algn="l"/>
-            <a:r>
-              <a:rPr sz="1000" b="0">
-                <a:solidFill>
-                  <a:srgbClr val="1F1F1F"/>
-                </a:solidFill>
-                <a:latin typeface="Arial"/>
-              </a:rPr>
-              <a:t>feedback active</a:t>
-            </a:r>
-          </a:p>
-        </p:txBody>
-      </p:sp>
-      <p:sp>
-        <p:nvSpPr>
-          <p:cNvPr id="14" name="TextBox 13"/>
-          <p:cNvSpPr txBox="1"/>
-          <p:nvPr/>
-        </p:nvSpPr>
-        <p:spPr>
-          <a:xfrm>
-            <a:off x="3798000" y="1062000"/>
-            <a:ext cx="1872000" cy="270000"/>
-          </a:xfrm>
-          <a:prstGeom prst="rect">
-            <a:avLst/>
-          </a:prstGeom>
-          <a:noFill/>
-        </p:spPr>
-        <p:txBody>
-          <a:bodyPr wrap="square" lIns="10800" rIns="10800" tIns="3600" bIns="3600">
-            <a:spAutoFit/>
-          </a:bodyPr>
-          <a:lstStyle/>
-          <a:p>
-            <a:pPr algn="l"/>
-            <a:r>
-              <a:rPr sz="1000" b="0">
-                <a:solidFill>
-                  <a:srgbClr val="1F1F1F"/>
-                </a:solidFill>
-                <a:latin typeface="Arial"/>
-              </a:rPr>
-              <a:t>rhythm and swing depth</a:t>
-            </a:r>
-          </a:p>
-          <a:p>
-            <a:pPr algn="l"/>
-            <a:r>
-              <a:rPr sz="1000" b="0">
-                <a:solidFill>
-                  <a:srgbClr val="1F1F1F"/>
-                </a:solidFill>
-                <a:latin typeface="Arial"/>
-              </a:rPr>
-              <a:t>(rhythm-gated)</a:t>
-            </a:r>
-          </a:p>
-        </p:txBody>
-      </p:sp>
-      <p:sp>
-        <p:nvSpPr>
-          <p:cNvPr id="15" name="Rounded Rectangle 14"/>
-          <p:cNvSpPr/>
-          <p:nvPr/>
-        </p:nvSpPr>
-        <p:spPr>
-          <a:xfrm>
-            <a:off x="108000" y="1544400"/>
-            <a:ext cx="5724000" cy="486000"/>
-          </a:xfrm>
-          <a:prstGeom prst="roundRect">
-            <a:avLst/>
-          </a:prstGeom>
-          <a:solidFill>
-            <a:srgbClr val="F2F2F2"/>
-          </a:solidFill>
-          <a:ln w="12700">
-            <a:solidFill>
-              <a:srgbClr val="1F1F1F"/>
-            </a:solidFill>
-          </a:ln>
-        </p:spPr>
-        <p:style>
-          <a:lnRef idx="1">
-            <a:schemeClr val="accent1"/>
-          </a:lnRef>
-          <a:fillRef idx="3">
-            <a:schemeClr val="accent1"/>
-          </a:fillRef>
-          <a:effectRef idx="2">
-            <a:schemeClr val="accent1"/>
-          </a:effectRef>
-          <a:fontRef idx="minor">
-            <a:schemeClr val="lt1"/>
-          </a:fontRef>
-        </p:style>
-        <p:txBody>
-          <a:bodyPr rtlCol="0" anchor="ctr"/>
-          <a:lstStyle/>
-          <a:p>
-            <a:pPr algn="ctr"/>
-          </a:p>
-        </p:txBody>
-      </p:sp>
-      <p:sp>
-        <p:nvSpPr>
-          <p:cNvPr id="16" name="Rounded Rectangle 15"/>
-          <p:cNvSpPr/>
-          <p:nvPr/>
-        </p:nvSpPr>
-        <p:spPr>
-          <a:xfrm>
-            <a:off x="162000" y="1670400"/>
-            <a:ext cx="234000" cy="234000"/>
-          </a:xfrm>
-          <a:prstGeom prst="roundRect">
-            <a:avLst/>
-          </a:prstGeom>
-          <a:solidFill>
-            <a:srgbClr val="9BC0DD"/>
-          </a:solidFill>
-          <a:ln w="9525">
-            <a:solidFill>
-              <a:srgbClr val="1F1F1F"/>
-            </a:solidFill>
-          </a:ln>
-        </p:spPr>
-        <p:style>
-          <a:lnRef idx="1">
-            <a:schemeClr val="accent1"/>
-          </a:lnRef>
-          <a:fillRef idx="3">
-            <a:schemeClr val="accent1"/>
-          </a:fillRef>
-          <a:effectRef idx="2">
-            <a:schemeClr val="accent1"/>
-          </a:effectRef>
-          <a:fontRef idx="minor">
-            <a:schemeClr val="lt1"/>
-          </a:fontRef>
-        </p:style>
-        <p:txBody>
-          <a:bodyPr rtlCol="0" anchor="ctr" wrap="none"/>
-          <a:lstStyle/>
-          <a:p>
-            <a:pPr algn="ctr"/>
-            <a:r>
-              <a:rPr sz="1100" b="1">
-                <a:solidFill>
-                  <a:srgbClr val="1F1F1F"/>
-                </a:solidFill>
-                <a:latin typeface="Arial"/>
-              </a:rPr>
-              <a:t>3</a:t>
-            </a:r>
-          </a:p>
-        </p:txBody>
-      </p:sp>
-      <p:sp>
-        <p:nvSpPr>
-          <p:cNvPr id="17" name="TextBox 16"/>
-          <p:cNvSpPr txBox="1"/>
-          <p:nvPr/>
-        </p:nvSpPr>
-        <p:spPr>
-          <a:xfrm>
-            <a:off x="522000" y="1645200"/>
-            <a:ext cx="1296000" cy="270000"/>
-          </a:xfrm>
-          <a:prstGeom prst="rect">
-            <a:avLst/>
-          </a:prstGeom>
-          <a:noFill/>
-        </p:spPr>
-        <p:txBody>
-          <a:bodyPr wrap="square" lIns="10800" rIns="10800" tIns="3600" bIns="3600">
-            <a:spAutoFit/>
-          </a:bodyPr>
-          <a:lstStyle/>
-          <a:p>
-            <a:pPr algn="l"/>
-            <a:r>
-              <a:rPr sz="1000" b="1">
-                <a:solidFill>
-                  <a:srgbClr val="1F1F1F"/>
-                </a:solidFill>
-                <a:latin typeface="Arial"/>
-              </a:rPr>
-              <a:t>Standing</a:t>
-            </a:r>
-          </a:p>
-          <a:p>
-            <a:pPr algn="l"/>
-            <a:r>
-              <a:rPr sz="1000" b="1">
-                <a:solidFill>
-                  <a:srgbClr val="1F1F1F"/>
-                </a:solidFill>
-                <a:latin typeface="Arial"/>
-              </a:rPr>
-              <a:t>balance</a:t>
-            </a:r>
-          </a:p>
-        </p:txBody>
-      </p:sp>
-      <p:sp>
-        <p:nvSpPr>
-          <p:cNvPr id="18" name="TextBox 17"/>
-          <p:cNvSpPr txBox="1"/>
-          <p:nvPr/>
-        </p:nvSpPr>
-        <p:spPr>
-          <a:xfrm>
-            <a:off x="1925999" y="1645200"/>
-            <a:ext cx="1800000" cy="270000"/>
-          </a:xfrm>
-          <a:prstGeom prst="rect">
-            <a:avLst/>
-          </a:prstGeom>
-          <a:noFill/>
-        </p:spPr>
-        <p:txBody>
-          <a:bodyPr wrap="square" lIns="10800" rIns="10800" tIns="3600" bIns="3600">
-            <a:spAutoFit/>
-          </a:bodyPr>
-          <a:lstStyle/>
-          <a:p>
-            <a:pPr algn="l"/>
-            <a:r>
-              <a:rPr sz="1000" b="0">
-                <a:solidFill>
-                  <a:srgbClr val="1F1F1F"/>
-                </a:solidFill>
-                <a:latin typeface="Arial"/>
-              </a:rPr>
-              <a:t>posture held under</a:t>
-            </a:r>
-          </a:p>
-          <a:p>
-            <a:pPr algn="l"/>
-            <a:r>
-              <a:rPr sz="1000" b="0">
-                <a:solidFill>
-                  <a:srgbClr val="1F1F1F"/>
-                </a:solidFill>
-                <a:latin typeface="Arial"/>
-              </a:rPr>
-              <a:t>push perturbations</a:t>
-            </a:r>
-          </a:p>
-        </p:txBody>
-      </p:sp>
-      <p:sp>
-        <p:nvSpPr>
-          <p:cNvPr id="19" name="TextBox 18"/>
-          <p:cNvSpPr txBox="1"/>
-          <p:nvPr/>
-        </p:nvSpPr>
-        <p:spPr>
-          <a:xfrm>
-            <a:off x="3798000" y="1645200"/>
-            <a:ext cx="1872000" cy="270000"/>
-          </a:xfrm>
-          <a:prstGeom prst="rect">
-            <a:avLst/>
-          </a:prstGeom>
-          <a:noFill/>
-        </p:spPr>
-        <p:txBody>
-          <a:bodyPr wrap="square" lIns="10800" rIns="10800" tIns="3600" bIns="3600">
-            <a:spAutoFit/>
-          </a:bodyPr>
-          <a:lstStyle/>
-          <a:p>
-            <a:pPr algn="l"/>
-            <a:r>
-              <a:rPr sz="1000" b="0">
-                <a:solidFill>
-                  <a:srgbClr val="1F1F1F"/>
-                </a:solidFill>
-                <a:latin typeface="Arial"/>
-              </a:rPr>
-              <a:t>posture maintenance</a:t>
-            </a:r>
-          </a:p>
-          <a:p>
-            <a:pPr algn="l"/>
-            <a:r>
-              <a:rPr sz="1000" b="0">
-                <a:solidFill>
-                  <a:srgbClr val="1F1F1F"/>
-                </a:solidFill>
-                <a:latin typeface="Arial"/>
-              </a:rPr>
-              <a:t>under push</a:t>
-            </a:r>
-          </a:p>
-        </p:txBody>
-      </p:sp>
-      <p:sp>
-        <p:nvSpPr>
-          <p:cNvPr id="20" name="Rounded Rectangle 19"/>
-          <p:cNvSpPr/>
-          <p:nvPr/>
-        </p:nvSpPr>
-        <p:spPr>
-          <a:xfrm>
-            <a:off x="108000" y="2127600"/>
-            <a:ext cx="5724000" cy="486000"/>
-          </a:xfrm>
-          <a:prstGeom prst="roundRect">
-            <a:avLst/>
-          </a:prstGeom>
-          <a:solidFill>
-            <a:srgbClr val="F2F2F2"/>
-          </a:solidFill>
-          <a:ln w="12700">
-            <a:solidFill>
-              <a:srgbClr val="1F1F1F"/>
-            </a:solidFill>
-          </a:ln>
-        </p:spPr>
-        <p:style>
-          <a:lnRef idx="1">
-            <a:schemeClr val="accent1"/>
-          </a:lnRef>
-          <a:fillRef idx="3">
-            <a:schemeClr val="accent1"/>
-          </a:fillRef>
-          <a:effectRef idx="2">
-            <a:schemeClr val="accent1"/>
-          </a:effectRef>
-          <a:fontRef idx="minor">
-            <a:schemeClr val="lt1"/>
-          </a:fontRef>
-        </p:style>
-        <p:txBody>
-          <a:bodyPr rtlCol="0" anchor="ctr"/>
-          <a:lstStyle/>
-          <a:p>
-            <a:pPr algn="ctr"/>
-          </a:p>
-        </p:txBody>
-      </p:sp>
-      <p:sp>
-        <p:nvSpPr>
-          <p:cNvPr id="21" name="Rounded Rectangle 20"/>
-          <p:cNvSpPr/>
-          <p:nvPr/>
-        </p:nvSpPr>
-        <p:spPr>
-          <a:xfrm>
-            <a:off x="162000" y="2253600"/>
-            <a:ext cx="234000" cy="234000"/>
-          </a:xfrm>
-          <a:prstGeom prst="roundRect">
-            <a:avLst/>
-          </a:prstGeom>
-          <a:solidFill>
-            <a:srgbClr val="6FA3CE"/>
-          </a:solidFill>
-          <a:ln w="9525">
-            <a:solidFill>
-              <a:srgbClr val="1F1F1F"/>
-            </a:solidFill>
-          </a:ln>
-        </p:spPr>
-        <p:style>
-          <a:lnRef idx="1">
-            <a:schemeClr val="accent1"/>
-          </a:lnRef>
-          <a:fillRef idx="3">
-            <a:schemeClr val="accent1"/>
-          </a:fillRef>
-          <a:effectRef idx="2">
-            <a:schemeClr val="accent1"/>
-          </a:effectRef>
-          <a:fontRef idx="minor">
-            <a:schemeClr val="lt1"/>
-          </a:fontRef>
-        </p:style>
-        <p:txBody>
-          <a:bodyPr rtlCol="0" anchor="ctr" wrap="none"/>
-          <a:lstStyle/>
-          <a:p>
-            <a:pPr algn="ctr"/>
-            <a:r>
-              <a:rPr sz="1100" b="1">
-                <a:solidFill>
-                  <a:srgbClr val="FFFFFF"/>
-                </a:solidFill>
-                <a:latin typeface="Arial"/>
-              </a:rPr>
-              <a:t>4</a:t>
-            </a:r>
-          </a:p>
-        </p:txBody>
-      </p:sp>
-      <p:sp>
-        <p:nvSpPr>
-          <p:cNvPr id="22" name="TextBox 21"/>
-          <p:cNvSpPr txBox="1"/>
-          <p:nvPr/>
-        </p:nvSpPr>
-        <p:spPr>
-          <a:xfrm>
-            <a:off x="522000" y="2228400"/>
-            <a:ext cx="1296000" cy="270000"/>
-          </a:xfrm>
-          <a:prstGeom prst="rect">
-            <a:avLst/>
-          </a:prstGeom>
-          <a:noFill/>
-        </p:spPr>
-        <p:txBody>
-          <a:bodyPr wrap="square" lIns="10800" rIns="10800" tIns="3600" bIns="3600">
-            <a:spAutoFit/>
-          </a:bodyPr>
-          <a:lstStyle/>
-          <a:p>
-            <a:pPr algn="l"/>
-            <a:r>
-              <a:rPr sz="1000" b="1">
-                <a:solidFill>
-                  <a:srgbClr val="1F1F1F"/>
-                </a:solidFill>
-                <a:latin typeface="Arial"/>
-              </a:rPr>
-              <a:t>Ground</a:t>
-            </a:r>
-          </a:p>
-          <a:p>
-            <a:pPr algn="l"/>
-            <a:r>
-              <a:rPr sz="1000" b="1">
-                <a:solidFill>
-                  <a:srgbClr val="1F1F1F"/>
-                </a:solidFill>
-                <a:latin typeface="Arial"/>
-              </a:rPr>
-              <a:t>walking</a:t>
-            </a:r>
-          </a:p>
-        </p:txBody>
-      </p:sp>
-      <p:sp>
-        <p:nvSpPr>
-          <p:cNvPr id="23" name="TextBox 22"/>
-          <p:cNvSpPr txBox="1"/>
-          <p:nvPr/>
-        </p:nvSpPr>
-        <p:spPr>
-          <a:xfrm>
-            <a:off x="1925999" y="2228400"/>
-            <a:ext cx="1800000" cy="270000"/>
-          </a:xfrm>
-          <a:prstGeom prst="rect">
-            <a:avLst/>
-          </a:prstGeom>
-          <a:noFill/>
-        </p:spPr>
-        <p:txBody>
-          <a:bodyPr wrap="square" lIns="10800" rIns="10800" tIns="3600" bIns="3600">
-            <a:spAutoFit/>
-          </a:bodyPr>
-          <a:lstStyle/>
-          <a:p>
-            <a:pPr algn="l"/>
-            <a:r>
-              <a:rPr sz="1000" b="0">
-                <a:solidFill>
-                  <a:srgbClr val="1F1F1F"/>
-                </a:solidFill>
-                <a:latin typeface="Arial"/>
-              </a:rPr>
-              <a:t>ground contact</a:t>
-            </a:r>
-          </a:p>
-          <a:p>
-            <a:pPr algn="l"/>
-            <a:r>
-              <a:rPr sz="1000" b="0">
-                <a:solidFill>
-                  <a:srgbClr val="1F1F1F"/>
-                </a:solidFill>
-                <a:latin typeface="Arial"/>
-              </a:rPr>
-              <a:t>and forward gait</a:t>
-            </a:r>
-          </a:p>
-        </p:txBody>
-      </p:sp>
-      <p:sp>
-        <p:nvSpPr>
-          <p:cNvPr id="24" name="TextBox 23"/>
-          <p:cNvSpPr txBox="1"/>
-          <p:nvPr/>
-        </p:nvSpPr>
-        <p:spPr>
-          <a:xfrm>
-            <a:off x="3798000" y="2228400"/>
-            <a:ext cx="1872000" cy="270000"/>
-          </a:xfrm>
-          <a:prstGeom prst="rect">
-            <a:avLst/>
-          </a:prstGeom>
-          <a:noFill/>
-        </p:spPr>
-        <p:txBody>
-          <a:bodyPr wrap="square" lIns="10800" rIns="10800" tIns="3600" bIns="3600">
-            <a:spAutoFit/>
-          </a:bodyPr>
-          <a:lstStyle/>
-          <a:p>
-            <a:pPr algn="l"/>
-            <a:r>
-              <a:rPr sz="1000" b="0">
-                <a:solidFill>
-                  <a:srgbClr val="1F1F1F"/>
-                </a:solidFill>
-                <a:latin typeface="Arial"/>
-              </a:rPr>
-              <a:t>kinematic score vs human</a:t>
-            </a:r>
-          </a:p>
-          <a:p>
-            <a:pPr algn="l"/>
-            <a:r>
-              <a:rPr sz="1000" b="0">
-                <a:solidFill>
-                  <a:srgbClr val="1F1F1F"/>
-                </a:solidFill>
-                <a:latin typeface="Arial"/>
-              </a:rPr>
-              <a:t>reference cycle</a:t>
-            </a:r>
-          </a:p>
-        </p:txBody>
-      </p:sp>
-      <p:sp>
-        <p:nvSpPr>
-          <p:cNvPr id="25" name="Rounded Rectangle 24"/>
-          <p:cNvSpPr/>
-          <p:nvPr/>
-        </p:nvSpPr>
-        <p:spPr>
-          <a:xfrm>
-            <a:off x="108000" y="2710800"/>
-            <a:ext cx="5724000" cy="486000"/>
-          </a:xfrm>
-          <a:prstGeom prst="roundRect">
-            <a:avLst/>
-          </a:prstGeom>
-          <a:solidFill>
-            <a:srgbClr val="F2F2F2"/>
-          </a:solidFill>
-          <a:ln w="12700">
-            <a:solidFill>
-              <a:srgbClr val="1F1F1F"/>
-            </a:solidFill>
-          </a:ln>
-        </p:spPr>
-        <p:style>
-          <a:lnRef idx="1">
-            <a:schemeClr val="accent1"/>
-          </a:lnRef>
-          <a:fillRef idx="3">
-            <a:schemeClr val="accent1"/>
-          </a:fillRef>
-          <a:effectRef idx="2">
-            <a:schemeClr val="accent1"/>
-          </a:effectRef>
-          <a:fontRef idx="minor">
-            <a:schemeClr val="lt1"/>
-          </a:fontRef>
-        </p:style>
-        <p:txBody>
-          <a:bodyPr rtlCol="0" anchor="ctr"/>
-          <a:lstStyle/>
-          <a:p>
-            <a:pPr algn="ctr"/>
-          </a:p>
-        </p:txBody>
-      </p:sp>
-      <p:sp>
-        <p:nvSpPr>
-          <p:cNvPr id="26" name="Rounded Rectangle 25"/>
-          <p:cNvSpPr/>
-          <p:nvPr/>
-        </p:nvSpPr>
-        <p:spPr>
-          <a:xfrm>
-            <a:off x="162000" y="2836800"/>
-            <a:ext cx="234000" cy="234000"/>
-          </a:xfrm>
-          <a:prstGeom prst="roundRect">
-            <a:avLst/>
-          </a:prstGeom>
-          <a:solidFill>
-            <a:srgbClr val="4B8ABE"/>
-          </a:solidFill>
-          <a:ln w="9525">
-            <a:solidFill>
-              <a:srgbClr val="1F1F1F"/>
-            </a:solidFill>
-          </a:ln>
-        </p:spPr>
-        <p:style>
-          <a:lnRef idx="1">
-            <a:schemeClr val="accent1"/>
-          </a:lnRef>
-          <a:fillRef idx="3">
-            <a:schemeClr val="accent1"/>
-          </a:fillRef>
-          <a:effectRef idx="2">
-            <a:schemeClr val="accent1"/>
-          </a:effectRef>
-          <a:fontRef idx="minor">
-            <a:schemeClr val="lt1"/>
-          </a:fontRef>
-        </p:style>
-        <p:txBody>
-          <a:bodyPr rtlCol="0" anchor="ctr" wrap="none"/>
-          <a:lstStyle/>
-          <a:p>
-            <a:pPr algn="ctr"/>
-            <a:r>
-              <a:rPr sz="1100" b="1">
-                <a:solidFill>
-                  <a:srgbClr val="FFFFFF"/>
-                </a:solidFill>
-                <a:latin typeface="Arial"/>
-              </a:rPr>
-              <a:t>5</a:t>
-            </a:r>
-          </a:p>
-        </p:txBody>
-      </p:sp>
-      <p:sp>
-        <p:nvSpPr>
-          <p:cNvPr id="27" name="TextBox 26"/>
-          <p:cNvSpPr txBox="1"/>
-          <p:nvPr/>
-        </p:nvSpPr>
-        <p:spPr>
-          <a:xfrm>
-            <a:off x="522000" y="2811600"/>
-            <a:ext cx="1296000" cy="270000"/>
-          </a:xfrm>
-          <a:prstGeom prst="rect">
-            <a:avLst/>
-          </a:prstGeom>
-          <a:noFill/>
-        </p:spPr>
-        <p:txBody>
-          <a:bodyPr wrap="square" lIns="10800" rIns="10800" tIns="3600" bIns="3600">
-            <a:spAutoFit/>
-          </a:bodyPr>
-          <a:lstStyle/>
-          <a:p>
-            <a:pPr algn="l"/>
-            <a:r>
-              <a:rPr sz="1000" b="1">
-                <a:solidFill>
-                  <a:srgbClr val="1F1F1F"/>
-                </a:solidFill>
-                <a:latin typeface="Arial"/>
-              </a:rPr>
-              <a:t>Contact-driven</a:t>
-            </a:r>
-          </a:p>
-          <a:p>
-            <a:pPr algn="l"/>
-            <a:r>
-              <a:rPr sz="1000" b="1">
-                <a:solidFill>
-                  <a:srgbClr val="1F1F1F"/>
-                </a:solidFill>
-                <a:latin typeface="Arial"/>
-              </a:rPr>
-              <a:t>ground walking</a:t>
-            </a:r>
-          </a:p>
-        </p:txBody>
-      </p:sp>
-      <p:sp>
-        <p:nvSpPr>
-          <p:cNvPr id="28" name="TextBox 27"/>
-          <p:cNvSpPr txBox="1"/>
-          <p:nvPr/>
-        </p:nvSpPr>
-        <p:spPr>
-          <a:xfrm>
-            <a:off x="1925999" y="2811600"/>
-            <a:ext cx="1800000" cy="270000"/>
-          </a:xfrm>
-          <a:prstGeom prst="rect">
-            <a:avLst/>
-          </a:prstGeom>
-          <a:noFill/>
-        </p:spPr>
-        <p:txBody>
-          <a:bodyPr wrap="square" lIns="10800" rIns="10800" tIns="3600" bIns="3600">
-            <a:spAutoFit/>
-          </a:bodyPr>
-          <a:lstStyle/>
-          <a:p>
-            <a:pPr algn="l"/>
-            <a:r>
-              <a:rPr sz="1000" b="0">
-                <a:solidFill>
-                  <a:srgbClr val="1F1F1F"/>
-                </a:solidFill>
-                <a:latin typeface="Arial"/>
-              </a:rPr>
-              <a:t>contact-driven pathway</a:t>
-            </a:r>
-          </a:p>
-          <a:p>
-            <a:pPr algn="l"/>
-            <a:r>
-              <a:rPr sz="1000" b="0">
-                <a:solidFill>
-                  <a:srgbClr val="1F1F1F"/>
-                </a:solidFill>
-                <a:latin typeface="Arial"/>
-              </a:rPr>
-              <a:t>variant of the walker</a:t>
-            </a:r>
-          </a:p>
-        </p:txBody>
-      </p:sp>
-      <p:sp>
-        <p:nvSpPr>
-          <p:cNvPr id="29" name="TextBox 28"/>
-          <p:cNvSpPr txBox="1"/>
-          <p:nvPr/>
-        </p:nvSpPr>
-        <p:spPr>
-          <a:xfrm>
-            <a:off x="3798000" y="2811600"/>
-            <a:ext cx="1872000" cy="270000"/>
-          </a:xfrm>
-          <a:prstGeom prst="rect">
-            <a:avLst/>
-          </a:prstGeom>
-          <a:noFill/>
-        </p:spPr>
-        <p:txBody>
-          <a:bodyPr wrap="square" lIns="10800" rIns="10800" tIns="3600" bIns="3600">
-            <a:spAutoFit/>
-          </a:bodyPr>
-          <a:lstStyle/>
-          <a:p>
-            <a:pPr algn="l"/>
-            <a:r>
-              <a:rPr sz="1000" b="0">
-                <a:solidFill>
-                  <a:srgbClr val="1F1F1F"/>
-                </a:solidFill>
-                <a:latin typeface="Arial"/>
-              </a:rPr>
-              <a:t>kinematic score vs human</a:t>
-            </a:r>
-          </a:p>
-          <a:p>
-            <a:pPr algn="l"/>
-            <a:r>
-              <a:rPr sz="1000" b="0">
-                <a:solidFill>
-                  <a:srgbClr val="1F1F1F"/>
-                </a:solidFill>
-                <a:latin typeface="Arial"/>
-              </a:rPr>
-              <a:t>reference cycle</a:t>
+              <a:t>Score</a:t>
             </a:r>
           </a:p>
         </p:txBody>
       </p:sp>
       <p:cxnSp>
         <p:nvCxnSpPr>
-          <p:cNvPr id="30" name="Connector 29"/>
+          <p:cNvPr id="6" name="Connector 5"/>
           <p:cNvCxnSpPr/>
           <p:nvPr/>
         </p:nvCxnSpPr>
         <p:spPr>
           <a:xfrm>
-            <a:off x="279000" y="871200"/>
-            <a:ext cx="0" cy="82800"/>
+            <a:off x="152400" y="393700"/>
+            <a:ext cx="5638800" cy="0"/>
           </a:xfrm>
           <a:prstGeom prst="line">
             <a:avLst/>
           </a:prstGeom>
           <a:ln w="12700">
             <a:solidFill>
-              <a:srgbClr val="1F1F1F"/>
+              <a:srgbClr val="6C7680"/>
             </a:solidFill>
-            <a:tailEnd type="triangle" w="med" len="med"/>
           </a:ln>
         </p:spPr>
         <p:style>
@@ -4429,25 +3303,270 @@
           </a:fontRef>
         </p:style>
       </p:cxnSp>
+      <p:sp>
+        <p:nvSpPr>
+          <p:cNvPr id="7" name="TextBox 6"/>
+          <p:cNvSpPr txBox="1"/>
+          <p:nvPr/>
+        </p:nvSpPr>
+        <p:spPr>
+          <a:xfrm>
+            <a:off x="203200" y="508000"/>
+            <a:ext cx="304800" cy="355600"/>
+          </a:xfrm>
+          <a:prstGeom prst="rect">
+            <a:avLst/>
+          </a:prstGeom>
+          <a:noFill/>
+        </p:spPr>
+        <p:txBody>
+          <a:bodyPr wrap="none" lIns="0" rIns="0" tIns="0" bIns="0">
+            <a:noAutofit/>
+          </a:bodyPr>
+          <a:lstStyle/>
+          <a:p>
+            <a:pPr algn="l">
+              <a:lnSpc>
+                <a:spcPts val="1320"/>
+              </a:lnSpc>
+              <a:spcBef>
+                <a:spcPts val="0"/>
+              </a:spcBef>
+              <a:spcAft>
+                <a:spcPts val="0"/>
+              </a:spcAft>
+            </a:pPr>
+            <a:r>
+              <a:rPr sz="1200" b="1" i="0">
+                <a:solidFill>
+                  <a:srgbClr val="0072B2"/>
+                </a:solidFill>
+                <a:latin typeface="Arial"/>
+              </a:rPr>
+              <a:t>1</a:t>
+            </a:r>
+          </a:p>
+        </p:txBody>
+      </p:sp>
+      <p:sp>
+        <p:nvSpPr>
+          <p:cNvPr id="8" name="TextBox 7"/>
+          <p:cNvSpPr txBox="1"/>
+          <p:nvPr/>
+        </p:nvSpPr>
+        <p:spPr>
+          <a:xfrm>
+            <a:off x="609600" y="508000"/>
+            <a:ext cx="1498600" cy="381000"/>
+          </a:xfrm>
+          <a:prstGeom prst="rect">
+            <a:avLst/>
+          </a:prstGeom>
+          <a:noFill/>
+        </p:spPr>
+        <p:txBody>
+          <a:bodyPr wrap="none" lIns="0" rIns="0" tIns="0" bIns="0">
+            <a:noAutofit/>
+          </a:bodyPr>
+          <a:lstStyle/>
+          <a:p>
+            <a:pPr algn="l">
+              <a:lnSpc>
+                <a:spcPts val="1210"/>
+              </a:lnSpc>
+              <a:spcBef>
+                <a:spcPts val="0"/>
+              </a:spcBef>
+              <a:spcAft>
+                <a:spcPts val="0"/>
+              </a:spcAft>
+            </a:pPr>
+            <a:r>
+              <a:rPr sz="1100" b="1" i="0">
+                <a:solidFill>
+                  <a:srgbClr val="243343"/>
+                </a:solidFill>
+                <a:latin typeface="Arial"/>
+              </a:rPr>
+              <a:t>Deafferented</a:t>
+            </a:r>
+          </a:p>
+          <a:p>
+            <a:pPr algn="l">
+              <a:lnSpc>
+                <a:spcPts val="1210"/>
+              </a:lnSpc>
+              <a:spcBef>
+                <a:spcPts val="0"/>
+              </a:spcBef>
+              <a:spcAft>
+                <a:spcPts val="0"/>
+              </a:spcAft>
+            </a:pPr>
+            <a:r>
+              <a:rPr sz="1100" b="1" i="0">
+                <a:solidFill>
+                  <a:srgbClr val="243343"/>
+                </a:solidFill>
+                <a:latin typeface="Arial"/>
+              </a:rPr>
+              <a:t>air stepping</a:t>
+            </a:r>
+          </a:p>
+        </p:txBody>
+      </p:sp>
+      <p:sp>
+        <p:nvSpPr>
+          <p:cNvPr id="9" name="TextBox 8"/>
+          <p:cNvSpPr txBox="1"/>
+          <p:nvPr/>
+        </p:nvSpPr>
+        <p:spPr>
+          <a:xfrm>
+            <a:off x="2235200" y="508000"/>
+            <a:ext cx="1714500" cy="381000"/>
+          </a:xfrm>
+          <a:prstGeom prst="rect">
+            <a:avLst/>
+          </a:prstGeom>
+          <a:noFill/>
+        </p:spPr>
+        <p:txBody>
+          <a:bodyPr wrap="none" lIns="0" rIns="0" tIns="0" bIns="0">
+            <a:noAutofit/>
+          </a:bodyPr>
+          <a:lstStyle/>
+          <a:p>
+            <a:pPr algn="l">
+              <a:lnSpc>
+                <a:spcPts val="1210"/>
+              </a:lnSpc>
+              <a:spcBef>
+                <a:spcPts val="0"/>
+              </a:spcBef>
+              <a:spcAft>
+                <a:spcPts val="0"/>
+              </a:spcAft>
+            </a:pPr>
+            <a:r>
+              <a:rPr sz="1100" b="0" i="0">
+                <a:solidFill>
+                  <a:srgbClr val="243343"/>
+                </a:solidFill>
+                <a:latin typeface="Arial"/>
+              </a:rPr>
+              <a:t>Intrinsic rhythm;</a:t>
+            </a:r>
+          </a:p>
+          <a:p>
+            <a:pPr algn="l">
+              <a:lnSpc>
+                <a:spcPts val="1210"/>
+              </a:lnSpc>
+              <a:spcBef>
+                <a:spcPts val="0"/>
+              </a:spcBef>
+              <a:spcAft>
+                <a:spcPts val="0"/>
+              </a:spcAft>
+            </a:pPr>
+            <a:r>
+              <a:rPr sz="1100" b="0" i="0">
+                <a:solidFill>
+                  <a:srgbClr val="243343"/>
+                </a:solidFill>
+                <a:latin typeface="Arial"/>
+              </a:rPr>
+              <a:t>feedback off</a:t>
+            </a:r>
+          </a:p>
+        </p:txBody>
+      </p:sp>
+      <p:sp>
+        <p:nvSpPr>
+          <p:cNvPr id="10" name="TextBox 9"/>
+          <p:cNvSpPr txBox="1"/>
+          <p:nvPr/>
+        </p:nvSpPr>
+        <p:spPr>
+          <a:xfrm>
+            <a:off x="4114800" y="508000"/>
+            <a:ext cx="1676400" cy="381000"/>
+          </a:xfrm>
+          <a:prstGeom prst="rect">
+            <a:avLst/>
+          </a:prstGeom>
+          <a:noFill/>
+        </p:spPr>
+        <p:txBody>
+          <a:bodyPr wrap="none" lIns="0" rIns="0" tIns="0" bIns="0">
+            <a:noAutofit/>
+          </a:bodyPr>
+          <a:lstStyle/>
+          <a:p>
+            <a:pPr algn="l">
+              <a:lnSpc>
+                <a:spcPts val="1210"/>
+              </a:lnSpc>
+              <a:spcBef>
+                <a:spcPts val="0"/>
+              </a:spcBef>
+              <a:spcAft>
+                <a:spcPts val="0"/>
+              </a:spcAft>
+            </a:pPr>
+            <a:r>
+              <a:rPr sz="1100" b="0" i="0">
+                <a:solidFill>
+                  <a:srgbClr val="243343"/>
+                </a:solidFill>
+                <a:latin typeface="Arial"/>
+              </a:rPr>
+              <a:t>Rhythm and swing</a:t>
+            </a:r>
+          </a:p>
+          <a:p>
+            <a:pPr algn="l">
+              <a:lnSpc>
+                <a:spcPts val="1210"/>
+              </a:lnSpc>
+              <a:spcBef>
+                <a:spcPts val="0"/>
+              </a:spcBef>
+              <a:spcAft>
+                <a:spcPts val="0"/>
+              </a:spcAft>
+            </a:pPr>
+            <a:r>
+              <a:rPr sz="1100" b="0" i="0">
+                <a:solidFill>
+                  <a:srgbClr val="243343"/>
+                </a:solidFill>
+                <a:latin typeface="Arial"/>
+              </a:rPr>
+              <a:t>(rhythm-gated)</a:t>
+            </a:r>
+          </a:p>
+        </p:txBody>
+      </p:sp>
       <p:cxnSp>
         <p:nvCxnSpPr>
-          <p:cNvPr id="31" name="Connector 30"/>
+          <p:cNvPr id="11" name="Connector 10"/>
           <p:cNvCxnSpPr/>
           <p:nvPr/>
         </p:nvCxnSpPr>
         <p:spPr>
           <a:xfrm>
-            <a:off x="279000" y="1454400"/>
-            <a:ext cx="0" cy="82800"/>
+            <a:off x="152400" y="939800"/>
+            <a:ext cx="5638800" cy="0"/>
           </a:xfrm>
           <a:prstGeom prst="line">
             <a:avLst/>
           </a:prstGeom>
-          <a:ln w="12700">
+          <a:ln w="7620">
             <a:solidFill>
-              <a:srgbClr val="1F1F1F"/>
+              <a:srgbClr val="D9E1E7"/>
             </a:solidFill>
-            <a:tailEnd type="triangle" w="med" len="med"/>
           </a:ln>
         </p:spPr>
         <p:style>
@@ -4465,25 +3584,270 @@
           </a:fontRef>
         </p:style>
       </p:cxnSp>
+      <p:sp>
+        <p:nvSpPr>
+          <p:cNvPr id="12" name="TextBox 11"/>
+          <p:cNvSpPr txBox="1"/>
+          <p:nvPr/>
+        </p:nvSpPr>
+        <p:spPr>
+          <a:xfrm>
+            <a:off x="203200" y="1028700"/>
+            <a:ext cx="304800" cy="355600"/>
+          </a:xfrm>
+          <a:prstGeom prst="rect">
+            <a:avLst/>
+          </a:prstGeom>
+          <a:noFill/>
+        </p:spPr>
+        <p:txBody>
+          <a:bodyPr wrap="none" lIns="0" rIns="0" tIns="0" bIns="0">
+            <a:noAutofit/>
+          </a:bodyPr>
+          <a:lstStyle/>
+          <a:p>
+            <a:pPr algn="l">
+              <a:lnSpc>
+                <a:spcPts val="1320"/>
+              </a:lnSpc>
+              <a:spcBef>
+                <a:spcPts val="0"/>
+              </a:spcBef>
+              <a:spcAft>
+                <a:spcPts val="0"/>
+              </a:spcAft>
+            </a:pPr>
+            <a:r>
+              <a:rPr sz="1200" b="1" i="0">
+                <a:solidFill>
+                  <a:srgbClr val="0072B2"/>
+                </a:solidFill>
+                <a:latin typeface="Arial"/>
+              </a:rPr>
+              <a:t>2</a:t>
+            </a:r>
+          </a:p>
+        </p:txBody>
+      </p:sp>
+      <p:sp>
+        <p:nvSpPr>
+          <p:cNvPr id="13" name="TextBox 12"/>
+          <p:cNvSpPr txBox="1"/>
+          <p:nvPr/>
+        </p:nvSpPr>
+        <p:spPr>
+          <a:xfrm>
+            <a:off x="609600" y="1028700"/>
+            <a:ext cx="1498600" cy="381000"/>
+          </a:xfrm>
+          <a:prstGeom prst="rect">
+            <a:avLst/>
+          </a:prstGeom>
+          <a:noFill/>
+        </p:spPr>
+        <p:txBody>
+          <a:bodyPr wrap="none" lIns="0" rIns="0" tIns="0" bIns="0">
+            <a:noAutofit/>
+          </a:bodyPr>
+          <a:lstStyle/>
+          <a:p>
+            <a:pPr algn="l">
+              <a:lnSpc>
+                <a:spcPts val="1210"/>
+              </a:lnSpc>
+              <a:spcBef>
+                <a:spcPts val="0"/>
+              </a:spcBef>
+              <a:spcAft>
+                <a:spcPts val="0"/>
+              </a:spcAft>
+            </a:pPr>
+            <a:r>
+              <a:rPr sz="1100" b="1" i="0">
+                <a:solidFill>
+                  <a:srgbClr val="243343"/>
+                </a:solidFill>
+                <a:latin typeface="Arial"/>
+              </a:rPr>
+              <a:t>Afferented</a:t>
+            </a:r>
+          </a:p>
+          <a:p>
+            <a:pPr algn="l">
+              <a:lnSpc>
+                <a:spcPts val="1210"/>
+              </a:lnSpc>
+              <a:spcBef>
+                <a:spcPts val="0"/>
+              </a:spcBef>
+              <a:spcAft>
+                <a:spcPts val="0"/>
+              </a:spcAft>
+            </a:pPr>
+            <a:r>
+              <a:rPr sz="1100" b="1" i="0">
+                <a:solidFill>
+                  <a:srgbClr val="243343"/>
+                </a:solidFill>
+                <a:latin typeface="Arial"/>
+              </a:rPr>
+              <a:t>air stepping</a:t>
+            </a:r>
+          </a:p>
+        </p:txBody>
+      </p:sp>
+      <p:sp>
+        <p:nvSpPr>
+          <p:cNvPr id="14" name="TextBox 13"/>
+          <p:cNvSpPr txBox="1"/>
+          <p:nvPr/>
+        </p:nvSpPr>
+        <p:spPr>
+          <a:xfrm>
+            <a:off x="2235200" y="1028700"/>
+            <a:ext cx="1714500" cy="381000"/>
+          </a:xfrm>
+          <a:prstGeom prst="rect">
+            <a:avLst/>
+          </a:prstGeom>
+          <a:noFill/>
+        </p:spPr>
+        <p:txBody>
+          <a:bodyPr wrap="none" lIns="0" rIns="0" tIns="0" bIns="0">
+            <a:noAutofit/>
+          </a:bodyPr>
+          <a:lstStyle/>
+          <a:p>
+            <a:pPr algn="l">
+              <a:lnSpc>
+                <a:spcPts val="1210"/>
+              </a:lnSpc>
+              <a:spcBef>
+                <a:spcPts val="0"/>
+              </a:spcBef>
+              <a:spcAft>
+                <a:spcPts val="0"/>
+              </a:spcAft>
+            </a:pPr>
+            <a:r>
+              <a:rPr sz="1100" b="0" i="0">
+                <a:solidFill>
+                  <a:srgbClr val="243343"/>
+                </a:solidFill>
+                <a:latin typeface="Arial"/>
+              </a:rPr>
+              <a:t>Heel, toe, and load</a:t>
+            </a:r>
+          </a:p>
+          <a:p>
+            <a:pPr algn="l">
+              <a:lnSpc>
+                <a:spcPts val="1210"/>
+              </a:lnSpc>
+              <a:spcBef>
+                <a:spcPts val="0"/>
+              </a:spcBef>
+              <a:spcAft>
+                <a:spcPts val="0"/>
+              </a:spcAft>
+            </a:pPr>
+            <a:r>
+              <a:rPr sz="1100" b="0" i="0">
+                <a:solidFill>
+                  <a:srgbClr val="243343"/>
+                </a:solidFill>
+                <a:latin typeface="Arial"/>
+              </a:rPr>
+              <a:t>feedback active</a:t>
+            </a:r>
+          </a:p>
+        </p:txBody>
+      </p:sp>
+      <p:sp>
+        <p:nvSpPr>
+          <p:cNvPr id="15" name="TextBox 14"/>
+          <p:cNvSpPr txBox="1"/>
+          <p:nvPr/>
+        </p:nvSpPr>
+        <p:spPr>
+          <a:xfrm>
+            <a:off x="4114800" y="1028700"/>
+            <a:ext cx="1676400" cy="381000"/>
+          </a:xfrm>
+          <a:prstGeom prst="rect">
+            <a:avLst/>
+          </a:prstGeom>
+          <a:noFill/>
+        </p:spPr>
+        <p:txBody>
+          <a:bodyPr wrap="none" lIns="0" rIns="0" tIns="0" bIns="0">
+            <a:noAutofit/>
+          </a:bodyPr>
+          <a:lstStyle/>
+          <a:p>
+            <a:pPr algn="l">
+              <a:lnSpc>
+                <a:spcPts val="1210"/>
+              </a:lnSpc>
+              <a:spcBef>
+                <a:spcPts val="0"/>
+              </a:spcBef>
+              <a:spcAft>
+                <a:spcPts val="0"/>
+              </a:spcAft>
+            </a:pPr>
+            <a:r>
+              <a:rPr sz="1100" b="0" i="0">
+                <a:solidFill>
+                  <a:srgbClr val="243343"/>
+                </a:solidFill>
+                <a:latin typeface="Arial"/>
+              </a:rPr>
+              <a:t>Rhythm and swing</a:t>
+            </a:r>
+          </a:p>
+          <a:p>
+            <a:pPr algn="l">
+              <a:lnSpc>
+                <a:spcPts val="1210"/>
+              </a:lnSpc>
+              <a:spcBef>
+                <a:spcPts val="0"/>
+              </a:spcBef>
+              <a:spcAft>
+                <a:spcPts val="0"/>
+              </a:spcAft>
+            </a:pPr>
+            <a:r>
+              <a:rPr sz="1100" b="0" i="0">
+                <a:solidFill>
+                  <a:srgbClr val="243343"/>
+                </a:solidFill>
+                <a:latin typeface="Arial"/>
+              </a:rPr>
+              <a:t>(rhythm-gated)</a:t>
+            </a:r>
+          </a:p>
+        </p:txBody>
+      </p:sp>
       <p:cxnSp>
         <p:nvCxnSpPr>
-          <p:cNvPr id="32" name="Connector 31"/>
+          <p:cNvPr id="16" name="Connector 15"/>
           <p:cNvCxnSpPr/>
           <p:nvPr/>
         </p:nvCxnSpPr>
         <p:spPr>
           <a:xfrm>
-            <a:off x="279000" y="2037600"/>
-            <a:ext cx="0" cy="82800"/>
+            <a:off x="152400" y="1460500"/>
+            <a:ext cx="5638800" cy="0"/>
           </a:xfrm>
           <a:prstGeom prst="line">
             <a:avLst/>
           </a:prstGeom>
-          <a:ln w="12700">
+          <a:ln w="7620">
             <a:solidFill>
-              <a:srgbClr val="1F1F1F"/>
+              <a:srgbClr val="D9E1E7"/>
             </a:solidFill>
-            <a:tailEnd type="triangle" w="med" len="med"/>
           </a:ln>
         </p:spPr>
         <p:style>
@@ -4501,25 +3865,270 @@
           </a:fontRef>
         </p:style>
       </p:cxnSp>
+      <p:sp>
+        <p:nvSpPr>
+          <p:cNvPr id="17" name="TextBox 16"/>
+          <p:cNvSpPr txBox="1"/>
+          <p:nvPr/>
+        </p:nvSpPr>
+        <p:spPr>
+          <a:xfrm>
+            <a:off x="203200" y="1549400"/>
+            <a:ext cx="304800" cy="355600"/>
+          </a:xfrm>
+          <a:prstGeom prst="rect">
+            <a:avLst/>
+          </a:prstGeom>
+          <a:noFill/>
+        </p:spPr>
+        <p:txBody>
+          <a:bodyPr wrap="none" lIns="0" rIns="0" tIns="0" bIns="0">
+            <a:noAutofit/>
+          </a:bodyPr>
+          <a:lstStyle/>
+          <a:p>
+            <a:pPr algn="l">
+              <a:lnSpc>
+                <a:spcPts val="1320"/>
+              </a:lnSpc>
+              <a:spcBef>
+                <a:spcPts val="0"/>
+              </a:spcBef>
+              <a:spcAft>
+                <a:spcPts val="0"/>
+              </a:spcAft>
+            </a:pPr>
+            <a:r>
+              <a:rPr sz="1200" b="1" i="0">
+                <a:solidFill>
+                  <a:srgbClr val="0072B2"/>
+                </a:solidFill>
+                <a:latin typeface="Arial"/>
+              </a:rPr>
+              <a:t>3</a:t>
+            </a:r>
+          </a:p>
+        </p:txBody>
+      </p:sp>
+      <p:sp>
+        <p:nvSpPr>
+          <p:cNvPr id="18" name="TextBox 17"/>
+          <p:cNvSpPr txBox="1"/>
+          <p:nvPr/>
+        </p:nvSpPr>
+        <p:spPr>
+          <a:xfrm>
+            <a:off x="609600" y="1549400"/>
+            <a:ext cx="1498600" cy="381000"/>
+          </a:xfrm>
+          <a:prstGeom prst="rect">
+            <a:avLst/>
+          </a:prstGeom>
+          <a:noFill/>
+        </p:spPr>
+        <p:txBody>
+          <a:bodyPr wrap="none" lIns="0" rIns="0" tIns="0" bIns="0">
+            <a:noAutofit/>
+          </a:bodyPr>
+          <a:lstStyle/>
+          <a:p>
+            <a:pPr algn="l">
+              <a:lnSpc>
+                <a:spcPts val="1210"/>
+              </a:lnSpc>
+              <a:spcBef>
+                <a:spcPts val="0"/>
+              </a:spcBef>
+              <a:spcAft>
+                <a:spcPts val="0"/>
+              </a:spcAft>
+            </a:pPr>
+            <a:r>
+              <a:rPr sz="1100" b="1" i="0">
+                <a:solidFill>
+                  <a:srgbClr val="243343"/>
+                </a:solidFill>
+                <a:latin typeface="Arial"/>
+              </a:rPr>
+              <a:t>Standing</a:t>
+            </a:r>
+          </a:p>
+          <a:p>
+            <a:pPr algn="l">
+              <a:lnSpc>
+                <a:spcPts val="1210"/>
+              </a:lnSpc>
+              <a:spcBef>
+                <a:spcPts val="0"/>
+              </a:spcBef>
+              <a:spcAft>
+                <a:spcPts val="0"/>
+              </a:spcAft>
+            </a:pPr>
+            <a:r>
+              <a:rPr sz="1100" b="1" i="0">
+                <a:solidFill>
+                  <a:srgbClr val="243343"/>
+                </a:solidFill>
+                <a:latin typeface="Arial"/>
+              </a:rPr>
+              <a:t>balance</a:t>
+            </a:r>
+          </a:p>
+        </p:txBody>
+      </p:sp>
+      <p:sp>
+        <p:nvSpPr>
+          <p:cNvPr id="19" name="TextBox 18"/>
+          <p:cNvSpPr txBox="1"/>
+          <p:nvPr/>
+        </p:nvSpPr>
+        <p:spPr>
+          <a:xfrm>
+            <a:off x="2235200" y="1549400"/>
+            <a:ext cx="1714500" cy="381000"/>
+          </a:xfrm>
+          <a:prstGeom prst="rect">
+            <a:avLst/>
+          </a:prstGeom>
+          <a:noFill/>
+        </p:spPr>
+        <p:txBody>
+          <a:bodyPr wrap="none" lIns="0" rIns="0" tIns="0" bIns="0">
+            <a:noAutofit/>
+          </a:bodyPr>
+          <a:lstStyle/>
+          <a:p>
+            <a:pPr algn="l">
+              <a:lnSpc>
+                <a:spcPts val="1210"/>
+              </a:lnSpc>
+              <a:spcBef>
+                <a:spcPts val="0"/>
+              </a:spcBef>
+              <a:spcAft>
+                <a:spcPts val="0"/>
+              </a:spcAft>
+            </a:pPr>
+            <a:r>
+              <a:rPr sz="1100" b="0" i="0">
+                <a:solidFill>
+                  <a:srgbClr val="243343"/>
+                </a:solidFill>
+                <a:latin typeface="Arial"/>
+              </a:rPr>
+              <a:t>Posture under</a:t>
+            </a:r>
+          </a:p>
+          <a:p>
+            <a:pPr algn="l">
+              <a:lnSpc>
+                <a:spcPts val="1210"/>
+              </a:lnSpc>
+              <a:spcBef>
+                <a:spcPts val="0"/>
+              </a:spcBef>
+              <a:spcAft>
+                <a:spcPts val="0"/>
+              </a:spcAft>
+            </a:pPr>
+            <a:r>
+              <a:rPr sz="1100" b="0" i="0">
+                <a:solidFill>
+                  <a:srgbClr val="243343"/>
+                </a:solidFill>
+                <a:latin typeface="Arial"/>
+              </a:rPr>
+              <a:t>push perturbations</a:t>
+            </a:r>
+          </a:p>
+        </p:txBody>
+      </p:sp>
+      <p:sp>
+        <p:nvSpPr>
+          <p:cNvPr id="20" name="TextBox 19"/>
+          <p:cNvSpPr txBox="1"/>
+          <p:nvPr/>
+        </p:nvSpPr>
+        <p:spPr>
+          <a:xfrm>
+            <a:off x="4114800" y="1549400"/>
+            <a:ext cx="1676400" cy="381000"/>
+          </a:xfrm>
+          <a:prstGeom prst="rect">
+            <a:avLst/>
+          </a:prstGeom>
+          <a:noFill/>
+        </p:spPr>
+        <p:txBody>
+          <a:bodyPr wrap="none" lIns="0" rIns="0" tIns="0" bIns="0">
+            <a:noAutofit/>
+          </a:bodyPr>
+          <a:lstStyle/>
+          <a:p>
+            <a:pPr algn="l">
+              <a:lnSpc>
+                <a:spcPts val="1210"/>
+              </a:lnSpc>
+              <a:spcBef>
+                <a:spcPts val="0"/>
+              </a:spcBef>
+              <a:spcAft>
+                <a:spcPts val="0"/>
+              </a:spcAft>
+            </a:pPr>
+            <a:r>
+              <a:rPr sz="1100" b="0" i="0">
+                <a:solidFill>
+                  <a:srgbClr val="243343"/>
+                </a:solidFill>
+                <a:latin typeface="Arial"/>
+              </a:rPr>
+              <a:t>Posture maintenance</a:t>
+            </a:r>
+          </a:p>
+          <a:p>
+            <a:pPr algn="l">
+              <a:lnSpc>
+                <a:spcPts val="1210"/>
+              </a:lnSpc>
+              <a:spcBef>
+                <a:spcPts val="0"/>
+              </a:spcBef>
+              <a:spcAft>
+                <a:spcPts val="0"/>
+              </a:spcAft>
+            </a:pPr>
+            <a:r>
+              <a:rPr sz="1100" b="0" i="0">
+                <a:solidFill>
+                  <a:srgbClr val="243343"/>
+                </a:solidFill>
+                <a:latin typeface="Arial"/>
+              </a:rPr>
+              <a:t>under push</a:t>
+            </a:r>
+          </a:p>
+        </p:txBody>
+      </p:sp>
       <p:cxnSp>
         <p:nvCxnSpPr>
-          <p:cNvPr id="33" name="Connector 32"/>
+          <p:cNvPr id="21" name="Connector 20"/>
           <p:cNvCxnSpPr/>
           <p:nvPr/>
         </p:nvCxnSpPr>
         <p:spPr>
           <a:xfrm>
-            <a:off x="279000" y="2620800"/>
-            <a:ext cx="0" cy="82800"/>
+            <a:off x="152400" y="1981200"/>
+            <a:ext cx="5638800" cy="0"/>
           </a:xfrm>
           <a:prstGeom prst="line">
             <a:avLst/>
           </a:prstGeom>
-          <a:ln w="12700">
+          <a:ln w="7620">
             <a:solidFill>
-              <a:srgbClr val="1F1F1F"/>
+              <a:srgbClr val="D9E1E7"/>
             </a:solidFill>
-            <a:tailEnd type="triangle" w="med" len="med"/>
           </a:ln>
         </p:spPr>
         <p:style>
@@ -4539,14 +4148,14 @@
       </p:cxnSp>
       <p:sp>
         <p:nvSpPr>
-          <p:cNvPr id="34" name="TextBox 33"/>
+          <p:cNvPr id="22" name="TextBox 21"/>
           <p:cNvSpPr txBox="1"/>
           <p:nvPr/>
         </p:nvSpPr>
         <p:spPr>
           <a:xfrm>
-            <a:off x="108000" y="3366000"/>
-            <a:ext cx="5724000" cy="270000"/>
+            <a:off x="203200" y="2070100"/>
+            <a:ext cx="304800" cy="355600"/>
           </a:xfrm>
           <a:prstGeom prst="rect">
             <a:avLst/>
@@ -4554,34 +4163,44 @@
           <a:noFill/>
         </p:spPr>
         <p:txBody>
-          <a:bodyPr wrap="square" lIns="10800" rIns="10800" tIns="3600" bIns="3600">
-            <a:spAutoFit/>
+          <a:bodyPr wrap="none" lIns="0" rIns="0" tIns="0" bIns="0">
+            <a:noAutofit/>
           </a:bodyPr>
           <a:lstStyle/>
           <a:p>
-            <a:pPr algn="l"/>
-            <a:r>
-              <a:rPr sz="1000" b="0">
-                <a:solidFill>
-                  <a:srgbClr val="1F1F1F"/>
+            <a:pPr algn="l">
+              <a:lnSpc>
+                <a:spcPts val="1320"/>
+              </a:lnSpc>
+              <a:spcBef>
+                <a:spcPts val="0"/>
+              </a:spcBef>
+              <a:spcAft>
+                <a:spcPts val="0"/>
+              </a:spcAft>
+            </a:pPr>
+            <a:r>
+              <a:rPr sz="1200" b="1" i="0">
+                <a:solidFill>
+                  <a:srgbClr val="0072B2"/>
                 </a:solidFill>
                 <a:latin typeface="Arial"/>
               </a:rPr>
-              <a:t>Each stage's winner seeds the next; only the newly activated pathway gains are searched.</a:t>
-            </a:r>
-          </a:p>
-        </p:txBody>
-      </p:sp>
-      <p:sp>
-        <p:nvSpPr>
-          <p:cNvPr id="35" name="TextBox 34"/>
+              <a:t>4</a:t>
+            </a:r>
+          </a:p>
+        </p:txBody>
+      </p:sp>
+      <p:sp>
+        <p:nvSpPr>
+          <p:cNvPr id="23" name="TextBox 22"/>
           <p:cNvSpPr txBox="1"/>
           <p:nvPr/>
         </p:nvSpPr>
         <p:spPr>
           <a:xfrm>
-            <a:off x="108000" y="3510000"/>
-            <a:ext cx="5724000" cy="270000"/>
+            <a:off x="609600" y="2070100"/>
+            <a:ext cx="1498600" cy="381000"/>
           </a:xfrm>
           <a:prstGeom prst="rect">
             <a:avLst/>
@@ -4589,20 +4208,569 @@
           <a:noFill/>
         </p:spPr>
         <p:txBody>
-          <a:bodyPr wrap="square" lIns="10800" rIns="10800" tIns="3600" bIns="3600">
-            <a:spAutoFit/>
+          <a:bodyPr wrap="none" lIns="0" rIns="0" tIns="0" bIns="0">
+            <a:noAutofit/>
           </a:bodyPr>
           <a:lstStyle/>
           <a:p>
-            <a:pPr algn="l"/>
-            <a:r>
-              <a:rPr sz="1000" b="0">
-                <a:solidFill>
-                  <a:srgbClr val="1F1F1F"/>
+            <a:pPr algn="l">
+              <a:lnSpc>
+                <a:spcPts val="1210"/>
+              </a:lnSpc>
+              <a:spcBef>
+                <a:spcPts val="0"/>
+              </a:spcBef>
+              <a:spcAft>
+                <a:spcPts val="0"/>
+              </a:spcAft>
+            </a:pPr>
+            <a:r>
+              <a:rPr sz="1100" b="1" i="0">
+                <a:solidFill>
+                  <a:srgbClr val="243343"/>
                 </a:solidFill>
                 <a:latin typeface="Arial"/>
               </a:rPr>
-              <a:t>Finalists at every stage must pass the perturbation and basin gates. Darker chips indicate less harness support.</a:t>
+              <a:t>Ground</a:t>
+            </a:r>
+          </a:p>
+          <a:p>
+            <a:pPr algn="l">
+              <a:lnSpc>
+                <a:spcPts val="1210"/>
+              </a:lnSpc>
+              <a:spcBef>
+                <a:spcPts val="0"/>
+              </a:spcBef>
+              <a:spcAft>
+                <a:spcPts val="0"/>
+              </a:spcAft>
+            </a:pPr>
+            <a:r>
+              <a:rPr sz="1100" b="1" i="0">
+                <a:solidFill>
+                  <a:srgbClr val="243343"/>
+                </a:solidFill>
+                <a:latin typeface="Arial"/>
+              </a:rPr>
+              <a:t>walking</a:t>
+            </a:r>
+          </a:p>
+        </p:txBody>
+      </p:sp>
+      <p:sp>
+        <p:nvSpPr>
+          <p:cNvPr id="24" name="TextBox 23"/>
+          <p:cNvSpPr txBox="1"/>
+          <p:nvPr/>
+        </p:nvSpPr>
+        <p:spPr>
+          <a:xfrm>
+            <a:off x="2235200" y="2070100"/>
+            <a:ext cx="1714500" cy="381000"/>
+          </a:xfrm>
+          <a:prstGeom prst="rect">
+            <a:avLst/>
+          </a:prstGeom>
+          <a:noFill/>
+        </p:spPr>
+        <p:txBody>
+          <a:bodyPr wrap="none" lIns="0" rIns="0" tIns="0" bIns="0">
+            <a:noAutofit/>
+          </a:bodyPr>
+          <a:lstStyle/>
+          <a:p>
+            <a:pPr algn="l">
+              <a:lnSpc>
+                <a:spcPts val="1210"/>
+              </a:lnSpc>
+              <a:spcBef>
+                <a:spcPts val="0"/>
+              </a:spcBef>
+              <a:spcAft>
+                <a:spcPts val="0"/>
+              </a:spcAft>
+            </a:pPr>
+            <a:r>
+              <a:rPr sz="1100" b="0" i="0">
+                <a:solidFill>
+                  <a:srgbClr val="243343"/>
+                </a:solidFill>
+                <a:latin typeface="Arial"/>
+              </a:rPr>
+              <a:t>Ground contact</a:t>
+            </a:r>
+          </a:p>
+          <a:p>
+            <a:pPr algn="l">
+              <a:lnSpc>
+                <a:spcPts val="1210"/>
+              </a:lnSpc>
+              <a:spcBef>
+                <a:spcPts val="0"/>
+              </a:spcBef>
+              <a:spcAft>
+                <a:spcPts val="0"/>
+              </a:spcAft>
+            </a:pPr>
+            <a:r>
+              <a:rPr sz="1100" b="0" i="0">
+                <a:solidFill>
+                  <a:srgbClr val="243343"/>
+                </a:solidFill>
+                <a:latin typeface="Arial"/>
+              </a:rPr>
+              <a:t>and forward gait</a:t>
+            </a:r>
+          </a:p>
+        </p:txBody>
+      </p:sp>
+      <p:sp>
+        <p:nvSpPr>
+          <p:cNvPr id="25" name="TextBox 24"/>
+          <p:cNvSpPr txBox="1"/>
+          <p:nvPr/>
+        </p:nvSpPr>
+        <p:spPr>
+          <a:xfrm>
+            <a:off x="4114800" y="2070100"/>
+            <a:ext cx="1676400" cy="381000"/>
+          </a:xfrm>
+          <a:prstGeom prst="rect">
+            <a:avLst/>
+          </a:prstGeom>
+          <a:noFill/>
+        </p:spPr>
+        <p:txBody>
+          <a:bodyPr wrap="none" lIns="0" rIns="0" tIns="0" bIns="0">
+            <a:noAutofit/>
+          </a:bodyPr>
+          <a:lstStyle/>
+          <a:p>
+            <a:pPr algn="l">
+              <a:lnSpc>
+                <a:spcPts val="1210"/>
+              </a:lnSpc>
+              <a:spcBef>
+                <a:spcPts val="0"/>
+              </a:spcBef>
+              <a:spcAft>
+                <a:spcPts val="0"/>
+              </a:spcAft>
+            </a:pPr>
+            <a:r>
+              <a:rPr sz="1100" b="0" i="0">
+                <a:solidFill>
+                  <a:srgbClr val="243343"/>
+                </a:solidFill>
+                <a:latin typeface="Arial"/>
+              </a:rPr>
+              <a:t>Kinematics vs. human</a:t>
+            </a:r>
+          </a:p>
+          <a:p>
+            <a:pPr algn="l">
+              <a:lnSpc>
+                <a:spcPts val="1210"/>
+              </a:lnSpc>
+              <a:spcBef>
+                <a:spcPts val="0"/>
+              </a:spcBef>
+              <a:spcAft>
+                <a:spcPts val="0"/>
+              </a:spcAft>
+            </a:pPr>
+            <a:r>
+              <a:rPr sz="1100" b="0" i="0">
+                <a:solidFill>
+                  <a:srgbClr val="243343"/>
+                </a:solidFill>
+                <a:latin typeface="Arial"/>
+              </a:rPr>
+              <a:t>reference cycle</a:t>
+            </a:r>
+          </a:p>
+        </p:txBody>
+      </p:sp>
+      <p:cxnSp>
+        <p:nvCxnSpPr>
+          <p:cNvPr id="26" name="Connector 25"/>
+          <p:cNvCxnSpPr/>
+          <p:nvPr/>
+        </p:nvCxnSpPr>
+        <p:spPr>
+          <a:xfrm>
+            <a:off x="152400" y="2501900"/>
+            <a:ext cx="5638800" cy="0"/>
+          </a:xfrm>
+          <a:prstGeom prst="line">
+            <a:avLst/>
+          </a:prstGeom>
+          <a:ln w="7620">
+            <a:solidFill>
+              <a:srgbClr val="D9E1E7"/>
+            </a:solidFill>
+          </a:ln>
+        </p:spPr>
+        <p:style>
+          <a:lnRef idx="2">
+            <a:schemeClr val="accent1"/>
+          </a:lnRef>
+          <a:fillRef idx="0">
+            <a:schemeClr val="accent1"/>
+          </a:fillRef>
+          <a:effectRef idx="1">
+            <a:schemeClr val="accent1"/>
+          </a:effectRef>
+          <a:fontRef idx="minor">
+            <a:schemeClr val="tx1"/>
+          </a:fontRef>
+        </p:style>
+      </p:cxnSp>
+      <p:sp>
+        <p:nvSpPr>
+          <p:cNvPr id="27" name="TextBox 26"/>
+          <p:cNvSpPr txBox="1"/>
+          <p:nvPr/>
+        </p:nvSpPr>
+        <p:spPr>
+          <a:xfrm>
+            <a:off x="203200" y="2590800"/>
+            <a:ext cx="304800" cy="355600"/>
+          </a:xfrm>
+          <a:prstGeom prst="rect">
+            <a:avLst/>
+          </a:prstGeom>
+          <a:noFill/>
+        </p:spPr>
+        <p:txBody>
+          <a:bodyPr wrap="none" lIns="0" rIns="0" tIns="0" bIns="0">
+            <a:noAutofit/>
+          </a:bodyPr>
+          <a:lstStyle/>
+          <a:p>
+            <a:pPr algn="l">
+              <a:lnSpc>
+                <a:spcPts val="1320"/>
+              </a:lnSpc>
+              <a:spcBef>
+                <a:spcPts val="0"/>
+              </a:spcBef>
+              <a:spcAft>
+                <a:spcPts val="0"/>
+              </a:spcAft>
+            </a:pPr>
+            <a:r>
+              <a:rPr sz="1200" b="1" i="0">
+                <a:solidFill>
+                  <a:srgbClr val="0072B2"/>
+                </a:solidFill>
+                <a:latin typeface="Arial"/>
+              </a:rPr>
+              <a:t>5</a:t>
+            </a:r>
+          </a:p>
+        </p:txBody>
+      </p:sp>
+      <p:sp>
+        <p:nvSpPr>
+          <p:cNvPr id="28" name="TextBox 27"/>
+          <p:cNvSpPr txBox="1"/>
+          <p:nvPr/>
+        </p:nvSpPr>
+        <p:spPr>
+          <a:xfrm>
+            <a:off x="609600" y="2590800"/>
+            <a:ext cx="1498600" cy="381000"/>
+          </a:xfrm>
+          <a:prstGeom prst="rect">
+            <a:avLst/>
+          </a:prstGeom>
+          <a:noFill/>
+        </p:spPr>
+        <p:txBody>
+          <a:bodyPr wrap="none" lIns="0" rIns="0" tIns="0" bIns="0">
+            <a:noAutofit/>
+          </a:bodyPr>
+          <a:lstStyle/>
+          <a:p>
+            <a:pPr algn="l">
+              <a:lnSpc>
+                <a:spcPts val="1210"/>
+              </a:lnSpc>
+              <a:spcBef>
+                <a:spcPts val="0"/>
+              </a:spcBef>
+              <a:spcAft>
+                <a:spcPts val="0"/>
+              </a:spcAft>
+            </a:pPr>
+            <a:r>
+              <a:rPr sz="1100" b="1" i="0">
+                <a:solidFill>
+                  <a:srgbClr val="243343"/>
+                </a:solidFill>
+                <a:latin typeface="Arial"/>
+              </a:rPr>
+              <a:t>Contact-driven</a:t>
+            </a:r>
+          </a:p>
+          <a:p>
+            <a:pPr algn="l">
+              <a:lnSpc>
+                <a:spcPts val="1210"/>
+              </a:lnSpc>
+              <a:spcBef>
+                <a:spcPts val="0"/>
+              </a:spcBef>
+              <a:spcAft>
+                <a:spcPts val="0"/>
+              </a:spcAft>
+            </a:pPr>
+            <a:r>
+              <a:rPr sz="1100" b="1" i="0">
+                <a:solidFill>
+                  <a:srgbClr val="243343"/>
+                </a:solidFill>
+                <a:latin typeface="Arial"/>
+              </a:rPr>
+              <a:t>ground walking</a:t>
+            </a:r>
+          </a:p>
+        </p:txBody>
+      </p:sp>
+      <p:sp>
+        <p:nvSpPr>
+          <p:cNvPr id="29" name="TextBox 28"/>
+          <p:cNvSpPr txBox="1"/>
+          <p:nvPr/>
+        </p:nvSpPr>
+        <p:spPr>
+          <a:xfrm>
+            <a:off x="2235200" y="2590800"/>
+            <a:ext cx="1714500" cy="381000"/>
+          </a:xfrm>
+          <a:prstGeom prst="rect">
+            <a:avLst/>
+          </a:prstGeom>
+          <a:noFill/>
+        </p:spPr>
+        <p:txBody>
+          <a:bodyPr wrap="none" lIns="0" rIns="0" tIns="0" bIns="0">
+            <a:noAutofit/>
+          </a:bodyPr>
+          <a:lstStyle/>
+          <a:p>
+            <a:pPr algn="l">
+              <a:lnSpc>
+                <a:spcPts val="1210"/>
+              </a:lnSpc>
+              <a:spcBef>
+                <a:spcPts val="0"/>
+              </a:spcBef>
+              <a:spcAft>
+                <a:spcPts val="0"/>
+              </a:spcAft>
+            </a:pPr>
+            <a:r>
+              <a:rPr sz="1100" b="0" i="0">
+                <a:solidFill>
+                  <a:srgbClr val="243343"/>
+                </a:solidFill>
+                <a:latin typeface="Arial"/>
+              </a:rPr>
+              <a:t>Contact-driven</a:t>
+            </a:r>
+          </a:p>
+          <a:p>
+            <a:pPr algn="l">
+              <a:lnSpc>
+                <a:spcPts val="1210"/>
+              </a:lnSpc>
+              <a:spcBef>
+                <a:spcPts val="0"/>
+              </a:spcBef>
+              <a:spcAft>
+                <a:spcPts val="0"/>
+              </a:spcAft>
+            </a:pPr>
+            <a:r>
+              <a:rPr sz="1100" b="0" i="0">
+                <a:solidFill>
+                  <a:srgbClr val="243343"/>
+                </a:solidFill>
+                <a:latin typeface="Arial"/>
+              </a:rPr>
+              <a:t>pathway variant</a:t>
+            </a:r>
+          </a:p>
+        </p:txBody>
+      </p:sp>
+      <p:sp>
+        <p:nvSpPr>
+          <p:cNvPr id="30" name="TextBox 29"/>
+          <p:cNvSpPr txBox="1"/>
+          <p:nvPr/>
+        </p:nvSpPr>
+        <p:spPr>
+          <a:xfrm>
+            <a:off x="4114800" y="2590800"/>
+            <a:ext cx="1676400" cy="381000"/>
+          </a:xfrm>
+          <a:prstGeom prst="rect">
+            <a:avLst/>
+          </a:prstGeom>
+          <a:noFill/>
+        </p:spPr>
+        <p:txBody>
+          <a:bodyPr wrap="none" lIns="0" rIns="0" tIns="0" bIns="0">
+            <a:noAutofit/>
+          </a:bodyPr>
+          <a:lstStyle/>
+          <a:p>
+            <a:pPr algn="l">
+              <a:lnSpc>
+                <a:spcPts val="1210"/>
+              </a:lnSpc>
+              <a:spcBef>
+                <a:spcPts val="0"/>
+              </a:spcBef>
+              <a:spcAft>
+                <a:spcPts val="0"/>
+              </a:spcAft>
+            </a:pPr>
+            <a:r>
+              <a:rPr sz="1100" b="0" i="0">
+                <a:solidFill>
+                  <a:srgbClr val="243343"/>
+                </a:solidFill>
+                <a:latin typeface="Arial"/>
+              </a:rPr>
+              <a:t>Kinematics vs. human</a:t>
+            </a:r>
+          </a:p>
+          <a:p>
+            <a:pPr algn="l">
+              <a:lnSpc>
+                <a:spcPts val="1210"/>
+              </a:lnSpc>
+              <a:spcBef>
+                <a:spcPts val="0"/>
+              </a:spcBef>
+              <a:spcAft>
+                <a:spcPts val="0"/>
+              </a:spcAft>
+            </a:pPr>
+            <a:r>
+              <a:rPr sz="1100" b="0" i="0">
+                <a:solidFill>
+                  <a:srgbClr val="243343"/>
+                </a:solidFill>
+                <a:latin typeface="Arial"/>
+              </a:rPr>
+              <a:t>reference cycle</a:t>
+            </a:r>
+          </a:p>
+        </p:txBody>
+      </p:sp>
+      <p:cxnSp>
+        <p:nvCxnSpPr>
+          <p:cNvPr id="31" name="Connector 30"/>
+          <p:cNvCxnSpPr/>
+          <p:nvPr/>
+        </p:nvCxnSpPr>
+        <p:spPr>
+          <a:xfrm>
+            <a:off x="152400" y="3022600"/>
+            <a:ext cx="5638800" cy="0"/>
+          </a:xfrm>
+          <a:prstGeom prst="line">
+            <a:avLst/>
+          </a:prstGeom>
+          <a:ln w="7620">
+            <a:solidFill>
+              <a:srgbClr val="D9E1E7"/>
+            </a:solidFill>
+          </a:ln>
+        </p:spPr>
+        <p:style>
+          <a:lnRef idx="2">
+            <a:schemeClr val="accent1"/>
+          </a:lnRef>
+          <a:fillRef idx="0">
+            <a:schemeClr val="accent1"/>
+          </a:fillRef>
+          <a:effectRef idx="1">
+            <a:schemeClr val="accent1"/>
+          </a:effectRef>
+          <a:fontRef idx="minor">
+            <a:schemeClr val="tx1"/>
+          </a:fontRef>
+        </p:style>
+      </p:cxnSp>
+      <p:sp>
+        <p:nvSpPr>
+          <p:cNvPr id="32" name="TextBox 31"/>
+          <p:cNvSpPr txBox="1"/>
+          <p:nvPr/>
+        </p:nvSpPr>
+        <p:spPr>
+          <a:xfrm>
+            <a:off x="177800" y="3200400"/>
+            <a:ext cx="5588000" cy="368300"/>
+          </a:xfrm>
+          <a:prstGeom prst="rect">
+            <a:avLst/>
+          </a:prstGeom>
+          <a:noFill/>
+        </p:spPr>
+        <p:txBody>
+          <a:bodyPr wrap="none" lIns="0" rIns="0" tIns="0" bIns="0">
+            <a:noAutofit/>
+          </a:bodyPr>
+          <a:lstStyle/>
+          <a:p>
+            <a:pPr algn="l">
+              <a:lnSpc>
+                <a:spcPts val="1188"/>
+              </a:lnSpc>
+              <a:spcBef>
+                <a:spcPts val="0"/>
+              </a:spcBef>
+              <a:spcAft>
+                <a:spcPts val="0"/>
+              </a:spcAft>
+            </a:pPr>
+            <a:r>
+              <a:rPr sz="1080" b="0" i="0">
+                <a:solidFill>
+                  <a:srgbClr val="243343"/>
+                </a:solidFill>
+                <a:latin typeface="Arial"/>
+              </a:rPr>
+              <a:t>Each winner seeds the next stage. Finalists undergo perturbation and basin checks.</a:t>
+            </a:r>
+          </a:p>
+          <a:p>
+            <a:pPr algn="l">
+              <a:lnSpc>
+                <a:spcPts val="1188"/>
+              </a:lnSpc>
+              <a:spcBef>
+                <a:spcPts val="0"/>
+              </a:spcBef>
+              <a:spcAft>
+                <a:spcPts val="0"/>
+              </a:spcAft>
+            </a:pPr>
+            <a:r>
+              <a:rPr sz="1080" b="0" i="0">
+                <a:solidFill>
+                  <a:srgbClr val="243343"/>
+                </a:solidFill>
+                <a:latin typeface="Arial"/>
+              </a:rPr>
+              <a:t>Air stages are suspended; ground evaluations retain the support harness.</a:t>
             </a:r>
           </a:p>
         </p:txBody>
